--- a/public/fun/pack/pptx/talkpro/발표템플릿프리미엄_33_업무보고_와인로즈.pptx
+++ b/public/fun/pack/pptx/talkpro/발표템플릿프리미엄_33_업무보고_와인로즈.pptx
@@ -115,12 +115,12 @@
   <p:extLst>
     <p:ext uri="{521415D9-36F7-43E2-AB2F-B90AF26B5E84}">
       <p14:sectionLst xmlns:p14="http://schemas.microsoft.com/office/powerpoint/2010/main">
-        <p14:section name="시작" id="{C2B1D250-092A-4B99-A639-72B7FBE2D7FD}">
+        <p14:section name="시작" id="{4C8F388F-6C7C-4553-A5C0-5498A7E2A074}">
           <p14:sldIdLst>
             <p14:sldId id="256"/>
           </p14:sldIdLst>
         </p14:section>
-        <p14:section name="본문" id="{C4509861-9F9C-49D6-A546-25E2A67FDD5C}">
+        <p14:section name="본문" id="{1D76EE14-9724-4B5C-96F6-EBD34A05E32F}">
           <p14:sldIdLst>
             <p14:sldId id="257"/>
             <p14:sldId id="258"/>
@@ -131,7 +131,7 @@
             <p14:sldId id="263"/>
           </p14:sldIdLst>
         </p14:section>
-        <p14:section name="마무리" id="{E2D91559-6971-47B4-8F9D-CBCCA41DB644}">
+        <p14:section name="마무리" id="{476C76DE-9098-4D46-B498-5C6A74344EBE}">
           <p14:sldIdLst>
             <p14:sldId id="264"/>
           </p14:sldIdLst>
@@ -1900,7 +1900,7 @@
             </a:lvl1pPr>
           </a:lstStyle>
           <a:p>
-            <a:fld id="{15DB5195-0716-4F16-96A4-C2323FDD91BC}" type="slidenum">
+            <a:fld id="{DE3B3CC1-FEE6-4913-8BDB-7A97EAE7C92B}" type="slidenum">
               <a:rPr lang="en-US"/>
               <a:t>‹#›</a:t>
             </a:fld>
@@ -2569,7 +2569,7 @@
             </a:lvl1pPr>
           </a:lstStyle>
           <a:p>
-            <a:fld id="{EA02782E-457F-40CC-AEF9-E2E68A3E545C}" type="slidenum">
+            <a:fld id="{55F10381-9C37-4ED4-8C12-5827C9EFBA0F}" type="slidenum">
               <a:rPr lang="en-US"/>
               <a:t>‹#›</a:t>
             </a:fld>
@@ -3247,7 +3247,7 @@
             </a:lvl1pPr>
           </a:lstStyle>
           <a:p>
-            <a:fld id="{65DA4554-D637-4099-8C9A-C24E657FC156}" type="slidenum">
+            <a:fld id="{BA73DFC8-931C-46B4-B76D-28E0C61D940D}" type="slidenum">
               <a:rPr lang="en-US"/>
               <a:t>‹#›</a:t>
             </a:fld>
@@ -4116,7 +4116,7 @@
           <a:p>
             <a:r>
               <a:rPr lang="ko-KR"/>
-              <a:t>0000. 00. 00</a:t>
+              <a:t>날짜 입력</a:t>
             </a:r>
           </a:p>
         </p:txBody>
@@ -4201,7 +4201,7 @@
           <a:bodyPr/>
           <a:lstStyle/>
           <a:p>
-            <a:fld id="{4B382D6C-061C-42CF-8CD1-F451A857DF32}" type="slidenum">
+            <a:fld id="{65493E53-6506-4017-8CD9-70987DDE5652}" type="slidenum">
               <a:rPr lang="en-US"/>
               <a:t>‹#›</a:t>
             </a:fld>
@@ -5403,7 +5403,7 @@
           <a:bodyPr/>
           <a:lstStyle/>
           <a:p>
-            <a:fld id="{1614775F-7841-461F-BF94-2F954D099228}" type="slidenum">
+            <a:fld id="{821A7F80-396D-419C-99B1-8105290F604C}" type="slidenum">
               <a:rPr lang="en-US"/>
               <a:t>‹#›</a:t>
             </a:fld>
@@ -5491,7 +5491,7 @@
           <a:bodyPr/>
           <a:lstStyle/>
           <a:p>
-            <a:fld id="{F379FF7A-7CF3-4E14-9D6F-BA72B91AB805}" type="slidenum">
+            <a:fld id="{AA5EF1DB-38F0-4366-AEAD-139BE6658636}" type="slidenum">
               <a:rPr lang="en-US"/>
               <a:t>‹#›</a:t>
             </a:fld>
@@ -6464,7 +6464,7 @@
           <a:bodyPr/>
           <a:lstStyle/>
           <a:p>
-            <a:fld id="{3D7260E9-F3BD-44CB-B372-C42439B2D532}" type="slidenum">
+            <a:fld id="{5ADBB882-5C7A-4552-A871-B70C5091575D}" type="slidenum">
               <a:rPr lang="en-US"/>
               <a:t>‹#›</a:t>
             </a:fld>
@@ -7112,7 +7112,7 @@
           <a:bodyPr/>
           <a:lstStyle/>
           <a:p>
-            <a:fld id="{864A27D6-FE52-49DE-8C0E-DBE9637DA707}" type="slidenum">
+            <a:fld id="{19363804-2CC7-41E9-A7C3-F28B6D70F42C}" type="slidenum">
               <a:rPr lang="en-US"/>
               <a:t>‹#›</a:t>
             </a:fld>
@@ -7295,7 +7295,7 @@
           <a:bodyPr/>
           <a:lstStyle/>
           <a:p>
-            <a:fld id="{ED2825C2-497C-4943-B771-A8C902D8424F}" type="slidenum">
+            <a:fld id="{6CD9B685-9EE6-4760-8586-3A8F808A64FB}" type="slidenum">
               <a:rPr lang="en-US"/>
               <a:t>‹#›</a:t>
             </a:fld>
@@ -8359,7 +8359,7 @@
           <a:bodyPr/>
           <a:lstStyle/>
           <a:p>
-            <a:fld id="{4FA877B7-2D7D-44B4-81E7-93F5405B2E29}" type="slidenum">
+            <a:fld id="{E33A1A9D-B092-4540-858C-3251282A3FF7}" type="slidenum">
               <a:rPr lang="en-US"/>
               <a:t>‹#›</a:t>
             </a:fld>
